--- a/L3/Занятие_3_Алгоритмические_собеседования.pptx
+++ b/L3/Занятие_3_Алгоритмические_собеседования.pptx
@@ -330,7 +330,7 @@
           <a:p>
             <a:fld id="{5BCAD085-E8A6-8845-BD4E-CB4CCA059FC4}" type="datetimeFigureOut">
               <a:rPr lang="en-US" smtClean="0"/>
-              <a:t>1/10/2026</a:t>
+              <a:t>3/12/2026</a:t>
             </a:fld>
             <a:endParaRPr lang="en-US"/>
           </a:p>
@@ -498,7 +498,7 @@
           <a:p>
             <a:fld id="{5BCAD085-E8A6-8845-BD4E-CB4CCA059FC4}" type="datetimeFigureOut">
               <a:rPr lang="en-US" smtClean="0"/>
-              <a:t>1/10/2026</a:t>
+              <a:t>3/12/2026</a:t>
             </a:fld>
             <a:endParaRPr lang="en-US"/>
           </a:p>
@@ -676,7 +676,7 @@
           <a:p>
             <a:fld id="{5BCAD085-E8A6-8845-BD4E-CB4CCA059FC4}" type="datetimeFigureOut">
               <a:rPr lang="en-US" smtClean="0"/>
-              <a:t>1/10/2026</a:t>
+              <a:t>3/12/2026</a:t>
             </a:fld>
             <a:endParaRPr lang="en-US"/>
           </a:p>
@@ -844,7 +844,7 @@
           <a:p>
             <a:fld id="{5BCAD085-E8A6-8845-BD4E-CB4CCA059FC4}" type="datetimeFigureOut">
               <a:rPr lang="en-US" smtClean="0"/>
-              <a:t>1/10/2026</a:t>
+              <a:t>3/12/2026</a:t>
             </a:fld>
             <a:endParaRPr lang="en-US"/>
           </a:p>
@@ -1089,7 +1089,7 @@
           <a:p>
             <a:fld id="{5BCAD085-E8A6-8845-BD4E-CB4CCA059FC4}" type="datetimeFigureOut">
               <a:rPr lang="en-US" smtClean="0"/>
-              <a:t>1/10/2026</a:t>
+              <a:t>3/12/2026</a:t>
             </a:fld>
             <a:endParaRPr lang="en-US"/>
           </a:p>
@@ -1374,7 +1374,7 @@
           <a:p>
             <a:fld id="{5BCAD085-E8A6-8845-BD4E-CB4CCA059FC4}" type="datetimeFigureOut">
               <a:rPr lang="en-US" smtClean="0"/>
-              <a:t>1/10/2026</a:t>
+              <a:t>3/12/2026</a:t>
             </a:fld>
             <a:endParaRPr lang="en-US"/>
           </a:p>
@@ -1793,7 +1793,7 @@
           <a:p>
             <a:fld id="{5BCAD085-E8A6-8845-BD4E-CB4CCA059FC4}" type="datetimeFigureOut">
               <a:rPr lang="en-US" smtClean="0"/>
-              <a:t>1/10/2026</a:t>
+              <a:t>3/12/2026</a:t>
             </a:fld>
             <a:endParaRPr lang="en-US"/>
           </a:p>
@@ -1910,7 +1910,7 @@
           <a:p>
             <a:fld id="{5BCAD085-E8A6-8845-BD4E-CB4CCA059FC4}" type="datetimeFigureOut">
               <a:rPr lang="en-US" smtClean="0"/>
-              <a:t>1/10/2026</a:t>
+              <a:t>3/12/2026</a:t>
             </a:fld>
             <a:endParaRPr lang="en-US"/>
           </a:p>
@@ -2005,7 +2005,7 @@
           <a:p>
             <a:fld id="{5BCAD085-E8A6-8845-BD4E-CB4CCA059FC4}" type="datetimeFigureOut">
               <a:rPr lang="en-US" smtClean="0"/>
-              <a:t>1/10/2026</a:t>
+              <a:t>3/12/2026</a:t>
             </a:fld>
             <a:endParaRPr lang="en-US"/>
           </a:p>
@@ -2280,7 +2280,7 @@
           <a:p>
             <a:fld id="{5BCAD085-E8A6-8845-BD4E-CB4CCA059FC4}" type="datetimeFigureOut">
               <a:rPr lang="en-US" smtClean="0"/>
-              <a:t>1/10/2026</a:t>
+              <a:t>3/12/2026</a:t>
             </a:fld>
             <a:endParaRPr lang="en-US"/>
           </a:p>
@@ -2532,7 +2532,7 @@
           <a:p>
             <a:fld id="{5BCAD085-E8A6-8845-BD4E-CB4CCA059FC4}" type="datetimeFigureOut">
               <a:rPr lang="en-US" smtClean="0"/>
-              <a:t>1/10/2026</a:t>
+              <a:t>3/12/2026</a:t>
             </a:fld>
             <a:endParaRPr lang="en-US"/>
           </a:p>
@@ -2743,7 +2743,7 @@
           <a:p>
             <a:fld id="{5BCAD085-E8A6-8845-BD4E-CB4CCA059FC4}" type="datetimeFigureOut">
               <a:rPr lang="en-US" smtClean="0"/>
-              <a:t>1/10/2026</a:t>
+              <a:t>3/12/2026</a:t>
             </a:fld>
             <a:endParaRPr lang="en-US"/>
           </a:p>
@@ -6148,17 +6148,10 @@
             <a:endParaRPr lang="en-US" dirty="0"/>
           </a:p>
           <a:p>
+            <a:pPr marL="0" indent="0">
+              <a:buNone/>
+            </a:pPr>
             <a:endParaRPr lang="en-US" dirty="0"/>
-          </a:p>
-          <a:p>
-            <a:pPr marL="0" indent="0">
-              <a:buNone/>
-            </a:pPr>
-            <a:r>
-              <a:rPr lang="en-US" dirty="0"/>
-              <a:t>https://replit.com/@ke1ry/Python</a:t>
-            </a:r>
-            <a:endParaRPr dirty="0"/>
           </a:p>
         </p:txBody>
       </p:sp>
